--- a/Evening Service.pptx
+++ b/Evening Service.pptx
@@ -22,6 +22,8 @@
     <p:sldId id="257" r:id="rId6"/>
     <p:sldId id="258" r:id="rId7"/>
     <p:sldId id="270" r:id="rId20"/>
+    <p:sldId id="271" r:id="rId21"/>
+    <p:sldId id="272" r:id="rId22"/>
   </p:sldIdLst>
   <p:sldSz cx="12192000" cy="6858000"/>
   <p:notesSz cx="7772400" cy="10058400"/>
@@ -8264,7 +8266,7 @@
                 <a:latin typeface="Calibri"/>
                 <a:ea typeface="DejaVu Sans"/>
               </a:rPr>
-              <a:t>2026-03-03, Evening Service</a:t>
+              <a:t>2026-03-05, Evening Service</a:t>
             </a:r>
             <a:endParaRPr b="0" lang="en-CA" sz="3600" spc="-1" strike="noStrike">
               <a:latin typeface="Arial"/>
@@ -8815,7 +8817,7 @@
               <a:defRPr sz="3200" b="1"/>
             </a:pPr>
             <a:r>
-              <a:t>#150C Sing Hallelujah! Praise the LORD!</a:t>
+              <a:t>#999 A song</a:t>
             </a:r>
           </a:p>
         </p:txBody>
@@ -8846,42 +8848,105 @@
               <a:defRPr sz="2500" b="0"/>
             </a:pPr>
             <a:r>
-              <a:t>3. With sounding cymbals praise the LORD! With clashing cymbals praise aloud! Hallelujah! Hallelujah! Let all that breathes now praise the LORD! O praise the LORD forevermore! O praise him! O praise him! Hallelujah! Hallelujah! Hallelujah!</a:t>
-            </a:r>
-          </a:p>
-        </p:txBody>
-      </p:sp>
-      <p:sp>
-        <p:nvSpPr>
-          <p:cNvPr id="4" name="TextBox 3"/>
+              <a:t>1. aljdf  al;kjdf  ;lakjdfj ureionbn a;nbpoe na;lkd pna nb</a:t>
+            </a:r>
+          </a:p>
+        </p:txBody>
+      </p:sp>
+    </p:spTree>
+  </p:cSld>
+  <p:clrMapOvr>
+    <a:masterClrMapping/>
+  </p:clrMapOvr>
+</p:sld>
+</file>
+
+<file path=ppt/slides/slide16.xml><?xml version="1.0" encoding="utf-8"?>
+<p:sld xmlns:a="http://schemas.openxmlformats.org/drawingml/2006/main" xmlns:p="http://schemas.openxmlformats.org/presentationml/2006/main" xmlns:r="http://schemas.openxmlformats.org/officeDocument/2006/relationships">
+  <p:cSld>
+    <p:spTree>
+      <p:nvGrpSpPr>
+        <p:cNvPr id="1" name=""/>
+        <p:cNvGrpSpPr/>
+        <p:nvPr/>
+      </p:nvGrpSpPr>
+      <p:grpSpPr/>
+      <p:sp>
+        <p:nvSpPr>
+          <p:cNvPr id="2" name="TextBox 1"/>
           <p:cNvSpPr txBox="1"/>
           <p:nvPr/>
         </p:nvSpPr>
         <p:spPr>
           <a:xfrm>
-            <a:off x="457200" y="6217920"/>
-            <a:ext cx="11277600" cy="457200"/>
-          </a:xfrm>
-          <a:prstGeom prst="rect">
-            <a:avLst/>
-          </a:prstGeom>
-          <a:noFill/>
-        </p:spPr>
-        <p:txBody>
-          <a:bodyPr wrap="square">
+            <a:off x="2667000" y="914400"/>
+            <a:ext cx="6858000" cy="4572000"/>
+          </a:xfrm>
+          <a:prstGeom prst="rect">
+            <a:avLst/>
+          </a:prstGeom>
+          <a:noFill/>
+        </p:spPr>
+        <p:txBody>
+          <a:bodyPr wrap="square" anchor="ctr">
             <a:spAutoFit/>
           </a:bodyPr>
           <a:lstStyle/>
           <a:p>
             <a:pPr algn="ctr">
-              <a:defRPr sz="1200" i="1">
-                <a:solidFill>
-                  <a:srgbClr val="787878"/>
-                </a:solidFill>
-              </a:defRPr>
-            </a:pPr>
-            <a:r>
-              <a:t>Copyright Trinity Psalter Hymnal, 2018, used by permission</a:t>
+              <a:defRPr sz="2500" b="0"/>
+            </a:pPr>
+            <a:r>
+              <a:t>2. alkdjf  alkdj lkajlkd  an falkj  nadf</a:t>
+            </a:r>
+          </a:p>
+        </p:txBody>
+      </p:sp>
+    </p:spTree>
+  </p:cSld>
+  <p:clrMapOvr>
+    <a:masterClrMapping/>
+  </p:clrMapOvr>
+</p:sld>
+</file>
+
+<file path=ppt/slides/slide17.xml><?xml version="1.0" encoding="utf-8"?>
+<p:sld xmlns:a="http://schemas.openxmlformats.org/drawingml/2006/main" xmlns:p="http://schemas.openxmlformats.org/presentationml/2006/main" xmlns:r="http://schemas.openxmlformats.org/officeDocument/2006/relationships">
+  <p:cSld>
+    <p:spTree>
+      <p:nvGrpSpPr>
+        <p:cNvPr id="1" name=""/>
+        <p:cNvGrpSpPr/>
+        <p:nvPr/>
+      </p:nvGrpSpPr>
+      <p:grpSpPr/>
+      <p:sp>
+        <p:nvSpPr>
+          <p:cNvPr id="2" name="TextBox 1"/>
+          <p:cNvSpPr txBox="1"/>
+          <p:nvPr/>
+        </p:nvSpPr>
+        <p:spPr>
+          <a:xfrm>
+            <a:off x="2667000" y="914400"/>
+            <a:ext cx="6858000" cy="4572000"/>
+          </a:xfrm>
+          <a:prstGeom prst="rect">
+            <a:avLst/>
+          </a:prstGeom>
+          <a:noFill/>
+        </p:spPr>
+        <p:txBody>
+          <a:bodyPr wrap="square" anchor="ctr">
+            <a:spAutoFit/>
+          </a:bodyPr>
+          <a:lstStyle/>
+          <a:p>
+            <a:pPr algn="ctr">
+              <a:defRPr sz="2500" b="0"/>
+            </a:pPr>
+            <a:r>
+              <a:t>3. lakjdl f al;kjd  ajdl;k alk lanlk djf alkn djal;k flan ;ldkna fn</a:t>
             </a:r>
           </a:p>
         </p:txBody>
